--- a/test/presentation_projet_IA.pptx
+++ b/test/presentation_projet_IA.pptx
@@ -5,11 +5,12 @@
     <p:sldMasterId id="2147483648" r:id="rId1"/>
   </p:sldMasterIdLst>
   <p:notesMasterIdLst>
-    <p:notesMasterId r:id="rId4"/>
+    <p:notesMasterId r:id="rId5"/>
   </p:notesMasterIdLst>
   <p:sldIdLst>
     <p:sldId id="256" r:id="rId2"/>
     <p:sldId id="257" r:id="rId3"/>
+    <p:sldId id="258" r:id="rId4"/>
   </p:sldIdLst>
   <p:sldSz cx="9144000" cy="5143500" type="screen16x9"/>
   <p:notesSz cx="5143500" cy="9144000"/>
@@ -423,6 +424,96 @@
 </p:notes>
 </file>
 
+<file path=ppt/notesSlides/notesSlide3.xml><?xml version="1.0" encoding="utf-8"?>
+<p:notes xmlns:a="http://schemas.openxmlformats.org/drawingml/2006/main" xmlns:r="http://schemas.openxmlformats.org/officeDocument/2006/relationships" xmlns:p="http://schemas.openxmlformats.org/presentationml/2006/main">
+  <p:cSld>
+    <p:spTree>
+      <p:nvGrpSpPr>
+        <p:cNvPr id="1" name=""/>
+        <p:cNvGrpSpPr/>
+        <p:nvPr/>
+      </p:nvGrpSpPr>
+      <p:grpSpPr>
+        <a:xfrm>
+          <a:off x="0" y="0"/>
+          <a:ext cx="0" cy="0"/>
+          <a:chOff x="0" y="0"/>
+          <a:chExt cx="0" cy="0"/>
+        </a:xfrm>
+      </p:grpSpPr>
+      <p:sp>
+        <p:nvSpPr>
+          <p:cNvPr id="2" name="Slide Image Placeholder 1"/>
+          <p:cNvSpPr>
+            <a:spLocks noGrp="1" noRot="1" noChangeAspect="1"/>
+          </p:cNvSpPr>
+          <p:nvPr>
+            <p:ph type="sldImg"/>
+          </p:nvPr>
+        </p:nvSpPr>
+        <p:spPr/>
+      </p:sp>
+      <p:sp>
+        <p:nvSpPr>
+          <p:cNvPr id="3" name="Notes Placeholder 2"/>
+          <p:cNvSpPr>
+            <a:spLocks noGrp="1"/>
+          </p:cNvSpPr>
+          <p:nvPr>
+            <p:ph type="body" idx="1"/>
+          </p:nvPr>
+        </p:nvSpPr>
+        <p:spPr/>
+        <p:txBody>
+          <a:bodyPr/>
+          <a:lstStyle/>
+          <a:p>
+            <a:r>
+              <a:rPr lang="en-US" dirty="0"/>
+              <a:t>Bonjour à tous,
+Nous sommes ravis de vous présenter notre projet final : le Générateur de Contenu IA Personnalisé.
+Ce projet a été développé dans le cadre de notre formation en Data Science et Python. Il mobilise l'ensemble des compétences acquises : programmation orientée objet, analyse de données avec Pandas et NumPy, visualisation avec Matplotlib et Seaborn, tests statistiques avec SciPy, et logique de recommandation basée sur la similarité cosinus.
+Nous sommes deux développeurs sur ce projet : Akré et Kia. Ensemble, nous avons conçu l'architecture du système, généré et nettoyé les données, puis construit le moteur de recommandation et l'interface Streamlit.</a:t>
+            </a:r>
+          </a:p>
+        </p:txBody>
+      </p:sp>
+      <p:sp>
+        <p:nvSpPr>
+          <p:cNvPr id="4" name="Slide Number Placeholder 3"/>
+          <p:cNvSpPr>
+            <a:spLocks noGrp="1"/>
+          </p:cNvSpPr>
+          <p:nvPr>
+            <p:ph type="sldNum" sz="quarter" idx="10"/>
+          </p:nvPr>
+        </p:nvSpPr>
+        <p:spPr/>
+        <p:txBody>
+          <a:bodyPr/>
+          <a:lstStyle/>
+          <a:p>
+            <a:fld id="{F7021451-1387-4CA6-816F-3879F97B5CBC}" type="slidenum">
+              <a:rPr lang="en-US"/>
+              <a:t>3</a:t>
+            </a:fld>
+            <a:endParaRPr lang="en-US"/>
+          </a:p>
+        </p:txBody>
+      </p:sp>
+    </p:spTree>
+    <p:extLst>
+      <p:ext uri="{BB962C8B-B14F-4D97-AF65-F5344CB8AC3E}">
+        <p14:creationId xmlns:p14="http://schemas.microsoft.com/office/powerpoint/2010/main" val="650987620"/>
+      </p:ext>
+    </p:extLst>
+  </p:cSld>
+  <p:clrMapOvr>
+    <a:masterClrMapping/>
+  </p:clrMapOvr>
+</p:notes>
+</file>
+
 <file path=ppt/slideLayouts/slideLayout1.xml><?xml version="1.0" encoding="utf-8"?>
 <p:sldLayout xmlns:a="http://schemas.openxmlformats.org/drawingml/2006/main" xmlns:r="http://schemas.openxmlformats.org/officeDocument/2006/relationships" xmlns:p="http://schemas.openxmlformats.org/presentationml/2006/main" preserve="1">
   <p:cSld name="DEFAULT">
@@ -2116,6 +2207,167 @@
         </p:txBody>
       </p:sp>
     </p:spTree>
+  </p:cSld>
+  <p:clrMapOvr>
+    <a:masterClrMapping/>
+  </p:clrMapOvr>
+</p:sld>
+</file>
+
+<file path=ppt/slides/slide3.xml><?xml version="1.0" encoding="utf-8"?>
+<p:sld xmlns:a="http://schemas.openxmlformats.org/drawingml/2006/main" xmlns:r="http://schemas.openxmlformats.org/officeDocument/2006/relationships" xmlns:p="http://schemas.openxmlformats.org/presentationml/2006/main">
+  <p:cSld>
+    <p:bg>
+      <p:bgPr>
+        <a:solidFill>
+          <a:srgbClr val="0F172A"/>
+        </a:solidFill>
+        <a:effectLst/>
+      </p:bgPr>
+    </p:bg>
+    <p:spTree>
+      <p:nvGrpSpPr>
+        <p:cNvPr id="1" name=""/>
+        <p:cNvGrpSpPr/>
+        <p:nvPr/>
+      </p:nvGrpSpPr>
+      <p:grpSpPr>
+        <a:xfrm>
+          <a:off x="0" y="0"/>
+          <a:ext cx="0" cy="0"/>
+          <a:chOff x="0" y="0"/>
+          <a:chExt cx="0" cy="0"/>
+        </a:xfrm>
+      </p:grpSpPr>
+      <p:sp>
+        <p:nvSpPr>
+          <p:cNvPr id="2" name="Shape 0"/>
+          <p:cNvSpPr/>
+          <p:nvPr/>
+        </p:nvSpPr>
+        <p:spPr>
+          <a:xfrm>
+            <a:off x="-731520" y="-731520"/>
+            <a:ext cx="3200400" cy="3200400"/>
+          </a:xfrm>
+          <a:prstGeom prst="ellipse">
+            <a:avLst/>
+          </a:prstGeom>
+          <a:solidFill>
+            <a:srgbClr val="6366F1">
+              <a:alpha val="20000"/>
+            </a:srgbClr>
+          </a:solidFill>
+          <a:ln w="12700">
+            <a:solidFill>
+              <a:srgbClr val="6366F1">
+                <a:alpha val="20000"/>
+              </a:srgbClr>
+            </a:solidFill>
+            <a:prstDash val="solid"/>
+          </a:ln>
+        </p:spPr>
+      </p:sp>
+      <p:sp>
+        <p:nvSpPr>
+          <p:cNvPr id="3" name="Shape 1"/>
+          <p:cNvSpPr/>
+          <p:nvPr/>
+        </p:nvSpPr>
+        <p:spPr>
+          <a:xfrm>
+            <a:off x="7132320" y="3200400"/>
+            <a:ext cx="3657600" cy="3657600"/>
+          </a:xfrm>
+          <a:prstGeom prst="ellipse">
+            <a:avLst/>
+          </a:prstGeom>
+          <a:solidFill>
+            <a:srgbClr val="6366F1">
+              <a:alpha val="15000"/>
+            </a:srgbClr>
+          </a:solidFill>
+          <a:ln w="12700">
+            <a:solidFill>
+              <a:srgbClr val="6366F1">
+                <a:alpha val="15000"/>
+              </a:srgbClr>
+            </a:solidFill>
+            <a:prstDash val="solid"/>
+          </a:ln>
+        </p:spPr>
+      </p:sp>
+      <p:sp>
+        <p:nvSpPr>
+          <p:cNvPr id="4" name="Shape 2"/>
+          <p:cNvSpPr/>
+          <p:nvPr/>
+        </p:nvSpPr>
+        <p:spPr>
+          <a:xfrm>
+            <a:off x="7772400" y="-457200"/>
+            <a:ext cx="1828800" cy="1828800"/>
+          </a:xfrm>
+          <a:prstGeom prst="ellipse">
+            <a:avLst/>
+          </a:prstGeom>
+          <a:solidFill>
+            <a:srgbClr val="818CF8">
+              <a:alpha val="25000"/>
+            </a:srgbClr>
+          </a:solidFill>
+          <a:ln w="12700">
+            <a:solidFill>
+              <a:srgbClr val="818CF8">
+                <a:alpha val="25000"/>
+              </a:srgbClr>
+            </a:solidFill>
+            <a:prstDash val="solid"/>
+          </a:ln>
+        </p:spPr>
+      </p:sp>
+      <p:sp>
+        <p:nvSpPr>
+          <p:cNvPr id="7" name="Text 5"/>
+          <p:cNvSpPr/>
+          <p:nvPr/>
+        </p:nvSpPr>
+        <p:spPr>
+          <a:xfrm>
+            <a:off x="457200" y="2154327"/>
+            <a:ext cx="8229600" cy="977493"/>
+          </a:xfrm>
+          <a:prstGeom prst="rect">
+            <a:avLst/>
+          </a:prstGeom>
+          <a:noFill/>
+          <a:ln/>
+        </p:spPr>
+        <p:txBody>
+          <a:bodyPr wrap="square" rtlCol="0" anchor="ctr"/>
+          <a:lstStyle/>
+          <a:p>
+            <a:pPr algn="ctr"/>
+            <a:r>
+              <a:rPr lang="fr-CI" sz="3800" b="1" kern="0" spc="50" dirty="0" smtClean="0">
+                <a:solidFill>
+                  <a:srgbClr val="FFFFFF"/>
+                </a:solidFill>
+                <a:latin typeface="Calibri" pitchFamily="34" charset="0"/>
+                <a:cs typeface="Calibri" pitchFamily="34" charset="-120"/>
+              </a:rPr>
+              <a:t>Démonstration </a:t>
+            </a:r>
+            <a:endParaRPr lang="en-US" sz="3800" dirty="0"/>
+          </a:p>
+        </p:txBody>
+      </p:sp>
+    </p:spTree>
+    <p:extLst>
+      <p:ext uri="{BB962C8B-B14F-4D97-AF65-F5344CB8AC3E}">
+        <p14:creationId xmlns:p14="http://schemas.microsoft.com/office/powerpoint/2010/main" val="2399741766"/>
+      </p:ext>
+    </p:extLst>
   </p:cSld>
   <p:clrMapOvr>
     <a:masterClrMapping/>
